--- a/marketing/LogicClass-Demo.pptx
+++ b/marketing/LogicClass-Demo.pptx
@@ -12344,7 +12344,7 @@
                 <a:ea typeface="Calibri" pitchFamily="34" charset="-122"/>
                 <a:cs typeface="Calibri" pitchFamily="34" charset="-120"/>
               </a:rPr>
-              <a:t>An unresolved alert about their child is shown as a banner, not hidden behind an icon</a:t>
+              <a:t>An unresolved alert about their child is a banner, not an icon - and it names who picked it up and who closed it</a:t>
             </a:r>
             <a:endParaRPr lang="en-US" sz="1000" dirty="0"/>
           </a:p>

--- a/marketing/LogicClass-Demo.pptx
+++ b/marketing/LogicClass-Demo.pptx
@@ -14466,12 +14466,12 @@
         </p:nvSpPr>
         <p:spPr>
           <a:xfrm>
-            <a:off x="640080" y="2148840"/>
-            <a:ext cx="5349240" cy="2103120"/>
+            <a:off x="640080" y="1874520"/>
+            <a:ext cx="3496056" cy="2148840"/>
           </a:xfrm>
           <a:prstGeom prst="roundRect">
             <a:avLst>
-              <a:gd name="adj" fmla="val 4348"/>
+              <a:gd name="adj" fmla="val 4255"/>
             </a:avLst>
           </a:prstGeom>
           <a:solidFill>
@@ -14500,7 +14500,7 @@
         </p:nvSpPr>
         <p:spPr>
           <a:xfrm>
-            <a:off x="877824" y="2368296"/>
+            <a:off x="877824" y="2093976"/>
             <a:ext cx="475488" cy="475488"/>
           </a:xfrm>
           <a:prstGeom prst="ellipse">
@@ -14533,7 +14533,7 @@
         </p:blipFill>
         <p:spPr>
           <a:xfrm>
-            <a:off x="992124" y="2482596"/>
+            <a:off x="992124" y="2208276"/>
             <a:ext cx="228600" cy="228600"/>
           </a:xfrm>
           <a:prstGeom prst="rect">
@@ -14549,8 +14549,8 @@
         </p:nvSpPr>
         <p:spPr>
           <a:xfrm>
-            <a:off x="877824" y="2935224"/>
-            <a:ext cx="4873752" cy="274320"/>
+            <a:off x="877824" y="2660904"/>
+            <a:ext cx="3020568" cy="274320"/>
           </a:xfrm>
           <a:prstGeom prst="rect">
             <a:avLst/>
@@ -14588,8 +14588,8 @@
         </p:nvSpPr>
         <p:spPr>
           <a:xfrm>
-            <a:off x="877824" y="3218688"/>
-            <a:ext cx="4873752" cy="822960"/>
+            <a:off x="877824" y="2944368"/>
+            <a:ext cx="3020568" cy="868680"/>
           </a:xfrm>
           <a:prstGeom prst="rect">
             <a:avLst/>
@@ -14630,12 +14630,12 @@
         </p:nvSpPr>
         <p:spPr>
           <a:xfrm>
-            <a:off x="6199632" y="2148840"/>
-            <a:ext cx="5349240" cy="2103120"/>
+            <a:off x="4346448" y="1874520"/>
+            <a:ext cx="3496056" cy="2148840"/>
           </a:xfrm>
           <a:prstGeom prst="roundRect">
             <a:avLst>
-              <a:gd name="adj" fmla="val 4348"/>
+              <a:gd name="adj" fmla="val 4255"/>
             </a:avLst>
           </a:prstGeom>
           <a:solidFill>
@@ -14664,7 +14664,7 @@
         </p:nvSpPr>
         <p:spPr>
           <a:xfrm>
-            <a:off x="6437376" y="2368296"/>
+            <a:off x="4584192" y="2093976"/>
             <a:ext cx="475488" cy="475488"/>
           </a:xfrm>
           <a:prstGeom prst="ellipse">
@@ -14697,7 +14697,7 @@
         </p:blipFill>
         <p:spPr>
           <a:xfrm>
-            <a:off x="6551676" y="2482596"/>
+            <a:off x="4698492" y="2208276"/>
             <a:ext cx="228600" cy="228600"/>
           </a:xfrm>
           <a:prstGeom prst="rect">
@@ -14713,8 +14713,8 @@
         </p:nvSpPr>
         <p:spPr>
           <a:xfrm>
-            <a:off x="6437376" y="2935224"/>
-            <a:ext cx="4873752" cy="274320"/>
+            <a:off x="4584192" y="2660904"/>
+            <a:ext cx="3020568" cy="274320"/>
           </a:xfrm>
           <a:prstGeom prst="rect">
             <a:avLst/>
@@ -14752,8 +14752,8 @@
         </p:nvSpPr>
         <p:spPr>
           <a:xfrm>
-            <a:off x="6437376" y="3218688"/>
-            <a:ext cx="4873752" cy="822960"/>
+            <a:off x="4584192" y="2944368"/>
+            <a:ext cx="3020568" cy="868680"/>
           </a:xfrm>
           <a:prstGeom prst="rect">
             <a:avLst/>
@@ -14794,12 +14794,12 @@
         </p:nvSpPr>
         <p:spPr>
           <a:xfrm>
-            <a:off x="640080" y="4480560"/>
-            <a:ext cx="5349240" cy="2103120"/>
+            <a:off x="8052816" y="1874520"/>
+            <a:ext cx="3496056" cy="2148840"/>
           </a:xfrm>
           <a:prstGeom prst="roundRect">
             <a:avLst>
-              <a:gd name="adj" fmla="val 4348"/>
+              <a:gd name="adj" fmla="val 4255"/>
             </a:avLst>
           </a:prstGeom>
           <a:solidFill>
@@ -14828,7 +14828,7 @@
         </p:nvSpPr>
         <p:spPr>
           <a:xfrm>
-            <a:off x="877824" y="4700016"/>
+            <a:off x="8290560" y="2093976"/>
             <a:ext cx="475488" cy="475488"/>
           </a:xfrm>
           <a:prstGeom prst="ellipse">
@@ -14861,7 +14861,7 @@
         </p:blipFill>
         <p:spPr>
           <a:xfrm>
-            <a:off x="992124" y="4814316"/>
+            <a:off x="8404860" y="2208276"/>
             <a:ext cx="228600" cy="228600"/>
           </a:xfrm>
           <a:prstGeom prst="rect">
@@ -14877,8 +14877,8 @@
         </p:nvSpPr>
         <p:spPr>
           <a:xfrm>
-            <a:off x="877824" y="5266944"/>
-            <a:ext cx="4873752" cy="274320"/>
+            <a:off x="8290560" y="2660904"/>
+            <a:ext cx="3020568" cy="274320"/>
           </a:xfrm>
           <a:prstGeom prst="rect">
             <a:avLst/>
@@ -14916,8 +14916,8 @@
         </p:nvSpPr>
         <p:spPr>
           <a:xfrm>
-            <a:off x="877824" y="5550408"/>
-            <a:ext cx="4873752" cy="822960"/>
+            <a:off x="8290560" y="2944368"/>
+            <a:ext cx="3020568" cy="868680"/>
           </a:xfrm>
           <a:prstGeom prst="rect">
             <a:avLst/>
@@ -14944,7 +14944,7 @@
                 <a:ea typeface="Calibri" pitchFamily="34" charset="-122"/>
                 <a:cs typeface="Calibri" pitchFamily="34" charset="-120"/>
               </a:rPr>
-              <a:t>Never reused, and named nothing - not the school, not the section, not the date. A room that could be guessed from a timetable on a noticeboard is a room a stranger can walk into.</a:t>
+              <a:t>Never reused, and named nothing - not the school, not the section, not the date. A room guessable from a timetable is one a stranger walks into.</a:t>
             </a:r>
             <a:endParaRPr lang="en-US" sz="1100" dirty="0"/>
           </a:p>
@@ -14958,12 +14958,12 @@
         </p:nvSpPr>
         <p:spPr>
           <a:xfrm>
-            <a:off x="6199632" y="4480560"/>
-            <a:ext cx="5349240" cy="2103120"/>
+            <a:off x="640080" y="4251960"/>
+            <a:ext cx="3496056" cy="2148840"/>
           </a:xfrm>
           <a:prstGeom prst="roundRect">
             <a:avLst>
-              <a:gd name="adj" fmla="val 4348"/>
+              <a:gd name="adj" fmla="val 4255"/>
             </a:avLst>
           </a:prstGeom>
           <a:solidFill>
@@ -14992,7 +14992,7 @@
         </p:nvSpPr>
         <p:spPr>
           <a:xfrm>
-            <a:off x="6437376" y="4700016"/>
+            <a:off x="877824" y="4471416"/>
             <a:ext cx="475488" cy="475488"/>
           </a:xfrm>
           <a:prstGeom prst="ellipse">
@@ -15025,7 +15025,7 @@
         </p:blipFill>
         <p:spPr>
           <a:xfrm>
-            <a:off x="6551676" y="4814316"/>
+            <a:off x="992124" y="4585716"/>
             <a:ext cx="228600" cy="228600"/>
           </a:xfrm>
           <a:prstGeom prst="rect">
@@ -15041,8 +15041,8 @@
         </p:nvSpPr>
         <p:spPr>
           <a:xfrm>
-            <a:off x="6437376" y="5266944"/>
-            <a:ext cx="4873752" cy="274320"/>
+            <a:off x="877824" y="5038344"/>
+            <a:ext cx="3020568" cy="274320"/>
           </a:xfrm>
           <a:prstGeom prst="rect">
             <a:avLst/>
@@ -15080,8 +15080,8 @@
         </p:nvSpPr>
         <p:spPr>
           <a:xfrm>
-            <a:off x="6437376" y="5550408"/>
-            <a:ext cx="4873752" cy="822960"/>
+            <a:off x="877824" y="5321808"/>
+            <a:ext cx="3020568" cy="868680"/>
           </a:xfrm>
           <a:prstGeom prst="rect">
             <a:avLst/>
@@ -15109,6 +15109,334 @@
                 <a:cs typeface="Calibri" pitchFamily="34" charset="-120"/>
               </a:rPr>
               <a:t>Ending the register ends the call. A lesson cannot outlive the teacher, which is the difference between a video class and a video link.</a:t>
+            </a:r>
+            <a:endParaRPr lang="en-US" sz="1100" dirty="0"/>
+          </a:p>
+        </p:txBody>
+      </p:sp>
+      <p:sp>
+        <p:nvSpPr>
+          <p:cNvPr id="25" name="Shape 19"/>
+          <p:cNvSpPr/>
+          <p:nvPr/>
+        </p:nvSpPr>
+        <p:spPr>
+          <a:xfrm>
+            <a:off x="4346448" y="4251960"/>
+            <a:ext cx="3496056" cy="2148840"/>
+          </a:xfrm>
+          <a:prstGeom prst="roundRect">
+            <a:avLst>
+              <a:gd name="adj" fmla="val 4255"/>
+            </a:avLst>
+          </a:prstGeom>
+          <a:solidFill>
+            <a:srgbClr val="F3F6FD"/>
+          </a:solidFill>
+          <a:ln w="9525">
+            <a:solidFill>
+              <a:srgbClr val="DCE4F5"/>
+            </a:solidFill>
+            <a:prstDash val="solid"/>
+          </a:ln>
+          <a:effectLst>
+            <a:outerShdw sx="100000" sy="100000" kx="0" ky="0" algn="bl" rotWithShape="0" blurRad="127000" dist="25400" dir="5400000">
+              <a:srgbClr val="1E2761">
+                <a:alpha val="10000"/>
+              </a:srgbClr>
+            </a:outerShdw>
+          </a:effectLst>
+        </p:spPr>
+      </p:sp>
+      <p:sp>
+        <p:nvSpPr>
+          <p:cNvPr id="26" name="Shape 20"/>
+          <p:cNvSpPr/>
+          <p:nvPr/>
+        </p:nvSpPr>
+        <p:spPr>
+          <a:xfrm>
+            <a:off x="4584192" y="4471416"/>
+            <a:ext cx="475488" cy="475488"/>
+          </a:xfrm>
+          <a:prstGeom prst="ellipse">
+            <a:avLst/>
+          </a:prstGeom>
+          <a:solidFill>
+            <a:srgbClr val="1E2761"/>
+          </a:solidFill>
+          <a:ln w="12700">
+            <a:solidFill>
+              <a:srgbClr val="1E2761"/>
+            </a:solidFill>
+            <a:prstDash val="solid"/>
+          </a:ln>
+        </p:spPr>
+      </p:sp>
+      <p:pic>
+        <p:nvPicPr>
+          <p:cNvPr id="27" name="Image 4" descr="preencoded.png">    </p:cNvPr>
+          <p:cNvPicPr>
+            <a:picLocks noChangeAspect="1"/>
+          </p:cNvPicPr>
+          <p:nvPr/>
+        </p:nvPicPr>
+        <p:blipFill>
+          <a:blip r:embed="rId5"/>
+          <a:stretch>
+            <a:fillRect/>
+          </a:stretch>
+        </p:blipFill>
+        <p:spPr>
+          <a:xfrm>
+            <a:off x="4698492" y="4585716"/>
+            <a:ext cx="228600" cy="228600"/>
+          </a:xfrm>
+          <a:prstGeom prst="rect">
+            <a:avLst/>
+          </a:prstGeom>
+        </p:spPr>
+      </p:pic>
+      <p:sp>
+        <p:nvSpPr>
+          <p:cNvPr id="28" name="Text 21"/>
+          <p:cNvSpPr txBox="1"/>
+          <p:nvPr/>
+        </p:nvSpPr>
+        <p:spPr>
+          <a:xfrm>
+            <a:off x="4584192" y="5038344"/>
+            <a:ext cx="3020568" cy="274320"/>
+          </a:xfrm>
+          <a:prstGeom prst="rect">
+            <a:avLst/>
+          </a:prstGeom>
+          <a:noFill/>
+          <a:ln/>
+        </p:spPr>
+        <p:txBody>
+          <a:bodyPr wrap="square" lIns="0" tIns="0" rIns="0" bIns="0" rtlCol="0" anchor="ctr"/>
+          <a:lstStyle/>
+          <a:p>
+            <a:pPr indent="0" marL="0">
+              <a:buNone/>
+            </a:pPr>
+            <a:r>
+              <a:rPr lang="en-US" sz="1400" b="1" dirty="0">
+                <a:solidFill>
+                  <a:srgbClr val="1E2761"/>
+                </a:solidFill>
+                <a:latin typeface="Calibri" pitchFamily="34" charset="0"/>
+                <a:ea typeface="Calibri" pitchFamily="34" charset="-122"/>
+                <a:cs typeface="Calibri" pitchFamily="34" charset="-120"/>
+              </a:rPr>
+              <a:t>The class has a bell</a:t>
+            </a:r>
+            <a:endParaRPr lang="en-US" sz="1400" dirty="0"/>
+          </a:p>
+        </p:txBody>
+      </p:sp>
+      <p:sp>
+        <p:nvSpPr>
+          <p:cNvPr id="29" name="Text 22"/>
+          <p:cNvSpPr txBox="1"/>
+          <p:nvPr/>
+        </p:nvSpPr>
+        <p:spPr>
+          <a:xfrm>
+            <a:off x="4584192" y="5321808"/>
+            <a:ext cx="3020568" cy="868680"/>
+          </a:xfrm>
+          <a:prstGeom prst="rect">
+            <a:avLst/>
+          </a:prstGeom>
+          <a:noFill/>
+          <a:ln/>
+        </p:spPr>
+        <p:txBody>
+          <a:bodyPr wrap="square" lIns="0" tIns="0" rIns="0" bIns="0" rtlCol="0" anchor="ctr"/>
+          <a:lstStyle/>
+          <a:p>
+            <a:pPr indent="0" marL="0">
+              <a:lnSpc>
+                <a:spcPts val="1500"/>
+              </a:lnSpc>
+              <a:buNone/>
+            </a:pPr>
+            <a:r>
+              <a:rPr lang="en-US" sz="1100" dirty="0">
+                <a:solidFill>
+                  <a:srgbClr val="55608A"/>
+                </a:solidFill>
+                <a:latin typeface="Calibri" pitchFamily="34" charset="0"/>
+                <a:ea typeface="Calibri" pitchFamily="34" charset="-122"/>
+                <a:cs typeface="Calibri" pitchFamily="34" charset="-120"/>
+              </a:rPr>
+              <a:t>A video call does not, so the classroom shows one: time elapsed against the period the timetable gives it, and the minutes left in words.</a:t>
+            </a:r>
+            <a:endParaRPr lang="en-US" sz="1100" dirty="0"/>
+          </a:p>
+        </p:txBody>
+      </p:sp>
+      <p:sp>
+        <p:nvSpPr>
+          <p:cNvPr id="30" name="Shape 23"/>
+          <p:cNvSpPr/>
+          <p:nvPr/>
+        </p:nvSpPr>
+        <p:spPr>
+          <a:xfrm>
+            <a:off x="8052816" y="4251960"/>
+            <a:ext cx="3496056" cy="2148840"/>
+          </a:xfrm>
+          <a:prstGeom prst="roundRect">
+            <a:avLst>
+              <a:gd name="adj" fmla="val 4255"/>
+            </a:avLst>
+          </a:prstGeom>
+          <a:solidFill>
+            <a:srgbClr val="F3F6FD"/>
+          </a:solidFill>
+          <a:ln w="9525">
+            <a:solidFill>
+              <a:srgbClr val="DCE4F5"/>
+            </a:solidFill>
+            <a:prstDash val="solid"/>
+          </a:ln>
+          <a:effectLst>
+            <a:outerShdw sx="100000" sy="100000" kx="0" ky="0" algn="bl" rotWithShape="0" blurRad="127000" dist="25400" dir="5400000">
+              <a:srgbClr val="1E2761">
+                <a:alpha val="10000"/>
+              </a:srgbClr>
+            </a:outerShdw>
+          </a:effectLst>
+        </p:spPr>
+      </p:sp>
+      <p:sp>
+        <p:nvSpPr>
+          <p:cNvPr id="31" name="Shape 24"/>
+          <p:cNvSpPr/>
+          <p:nvPr/>
+        </p:nvSpPr>
+        <p:spPr>
+          <a:xfrm>
+            <a:off x="8290560" y="4471416"/>
+            <a:ext cx="475488" cy="475488"/>
+          </a:xfrm>
+          <a:prstGeom prst="ellipse">
+            <a:avLst/>
+          </a:prstGeom>
+          <a:solidFill>
+            <a:srgbClr val="1E2761"/>
+          </a:solidFill>
+          <a:ln w="12700">
+            <a:solidFill>
+              <a:srgbClr val="1E2761"/>
+            </a:solidFill>
+            <a:prstDash val="solid"/>
+          </a:ln>
+        </p:spPr>
+      </p:sp>
+      <p:pic>
+        <p:nvPicPr>
+          <p:cNvPr id="32" name="Image 5" descr="preencoded.png">    </p:cNvPr>
+          <p:cNvPicPr>
+            <a:picLocks noChangeAspect="1"/>
+          </p:cNvPicPr>
+          <p:nvPr/>
+        </p:nvPicPr>
+        <p:blipFill>
+          <a:blip r:embed="rId6"/>
+          <a:stretch>
+            <a:fillRect/>
+          </a:stretch>
+        </p:blipFill>
+        <p:spPr>
+          <a:xfrm>
+            <a:off x="8404860" y="4585716"/>
+            <a:ext cx="228600" cy="228600"/>
+          </a:xfrm>
+          <a:prstGeom prst="rect">
+            <a:avLst/>
+          </a:prstGeom>
+        </p:spPr>
+      </p:pic>
+      <p:sp>
+        <p:nvSpPr>
+          <p:cNvPr id="33" name="Text 25"/>
+          <p:cNvSpPr txBox="1"/>
+          <p:nvPr/>
+        </p:nvSpPr>
+        <p:spPr>
+          <a:xfrm>
+            <a:off x="8290560" y="5038344"/>
+            <a:ext cx="3020568" cy="274320"/>
+          </a:xfrm>
+          <a:prstGeom prst="rect">
+            <a:avLst/>
+          </a:prstGeom>
+          <a:noFill/>
+          <a:ln/>
+        </p:spPr>
+        <p:txBody>
+          <a:bodyPr wrap="square" lIns="0" tIns="0" rIns="0" bIns="0" rtlCol="0" anchor="ctr"/>
+          <a:lstStyle/>
+          <a:p>
+            <a:pPr indent="0" marL="0">
+              <a:buNone/>
+            </a:pPr>
+            <a:r>
+              <a:rPr lang="en-US" sz="1400" b="1" dirty="0">
+                <a:solidFill>
+                  <a:srgbClr val="1E2761"/>
+                </a:solidFill>
+                <a:latin typeface="Calibri" pitchFamily="34" charset="0"/>
+                <a:ea typeface="Calibri" pitchFamily="34" charset="-122"/>
+                <a:cs typeface="Calibri" pitchFamily="34" charset="-120"/>
+              </a:rPr>
+              <a:t>In the app on a phone</a:t>
+            </a:r>
+            <a:endParaRPr lang="en-US" sz="1400" dirty="0"/>
+          </a:p>
+        </p:txBody>
+      </p:sp>
+      <p:sp>
+        <p:nvSpPr>
+          <p:cNvPr id="34" name="Text 26"/>
+          <p:cNvSpPr txBox="1"/>
+          <p:nvPr/>
+        </p:nvSpPr>
+        <p:spPr>
+          <a:xfrm>
+            <a:off x="8290560" y="5321808"/>
+            <a:ext cx="3020568" cy="868680"/>
+          </a:xfrm>
+          <a:prstGeom prst="rect">
+            <a:avLst/>
+          </a:prstGeom>
+          <a:noFill/>
+          <a:ln/>
+        </p:spPr>
+        <p:txBody>
+          <a:bodyPr wrap="square" lIns="0" tIns="0" rIns="0" bIns="0" rtlCol="0" anchor="ctr"/>
+          <a:lstStyle/>
+          <a:p>
+            <a:pPr indent="0" marL="0">
+              <a:lnSpc>
+                <a:spcPts val="1500"/>
+              </a:lnSpc>
+              <a:buNone/>
+            </a:pPr>
+            <a:r>
+              <a:rPr lang="en-US" sz="1100" dirty="0">
+                <a:solidFill>
+                  <a:srgbClr val="55608A"/>
+                </a:solidFill>
+                <a:latin typeface="Calibri" pitchFamily="34" charset="0"/>
+                <a:ea typeface="Calibri" pitchFamily="34" charset="-122"/>
+                <a:cs typeface="Calibri" pitchFamily="34" charset="-120"/>
+              </a:rPr>
+              <a:t>Android and iPhone run the lesson inside LogicClass itself - no browser, nothing else to install. On a computer it runs in the page.</a:t>
             </a:r>
             <a:endParaRPr lang="en-US" sz="1100" dirty="0"/>
           </a:p>
